--- a/cupia-ai-research/docs/01_제안서/PROPOSAL_CUPIA_AI_연구과제_2026_v0.3.pptx
+++ b/cupia-ai-research/docs/01_제안서/PROPOSAL_CUPIA_AI_연구과제_2026_v0.3.pptx
@@ -3387,7 +3387,7 @@
                 <a:latin typeface="맑은 고딕"/>
                 <a:ea typeface="맑은 고딕"/>
               </a:rPr>
-              <a:t>(주)시커스랩  SeekersLab</a:t>
+              <a:t>(주)씨커스  Seekers Inc.</a:t>
             </a:r>
           </a:p>
         </p:txBody>
@@ -4109,7 +4109,7 @@
                 <a:latin typeface="맑은 고딕"/>
                 <a:ea typeface="맑은 고딕"/>
               </a:rPr>
-              <a:t>CUPIA AI 연구 과제 2026 수행 제안서  ·  (주)시커스랩</a:t>
+              <a:t>CUPIA AI 연구 과제 2026 수행 제안서  ·  (주)씨커스</a:t>
             </a:r>
           </a:p>
         </p:txBody>
@@ -5466,7 +5466,7 @@
                 <a:latin typeface="맑은 고딕"/>
                 <a:ea typeface="맑은 고딕"/>
               </a:rPr>
-              <a:t>CUPIA AI 연구 과제 2026 수행 제안서  ·  (주)시커스랩</a:t>
+              <a:t>CUPIA AI 연구 과제 2026 수행 제안서  ·  (주)씨커스</a:t>
             </a:r>
           </a:p>
         </p:txBody>
@@ -7220,7 +7220,7 @@
                 <a:latin typeface="맑은 고딕"/>
                 <a:ea typeface="맑은 고딕"/>
               </a:rPr>
-              <a:t>(주)시커스랩  SeekersLab</a:t>
+              <a:t>(주)씨커스  Seekers Inc.</a:t>
             </a:r>
           </a:p>
           <a:p>
@@ -7588,7 +7588,7 @@
                 <a:latin typeface="맑은 고딕"/>
                 <a:ea typeface="맑은 고딕"/>
               </a:rPr>
-              <a:t>CUPIA AI 연구 과제 2026 수행 제안서  ·  (주)시커스랩</a:t>
+              <a:t>CUPIA AI 연구 과제 2026 수행 제안서  ·  (주)씨커스</a:t>
             </a:r>
           </a:p>
         </p:txBody>
@@ -8300,7 +8300,7 @@
                 <a:latin typeface="맑은 고딕"/>
                 <a:ea typeface="맑은 고딕"/>
               </a:rPr>
-              <a:t>(주)시커스랩</a:t>
+              <a:t>(주)씨커스</a:t>
             </a:r>
           </a:p>
         </p:txBody>
@@ -9136,7 +9136,7 @@
                 <a:latin typeface="맑은 고딕"/>
                 <a:ea typeface="맑은 고딕"/>
               </a:rPr>
-              <a:t>CUPIA AI 연구 과제 2026 수행 제안서  ·  (주)시커스랩</a:t>
+              <a:t>CUPIA AI 연구 과제 2026 수행 제안서  ·  (주)씨커스</a:t>
             </a:r>
           </a:p>
         </p:txBody>
@@ -10412,7 +10412,7 @@
                 <a:latin typeface="맑은 고딕"/>
                 <a:ea typeface="맑은 고딕"/>
               </a:rPr>
-              <a:t>CUPIA AI 연구 과제 2026 수행 제안서  ·  (주)시커스랩</a:t>
+              <a:t>CUPIA AI 연구 과제 2026 수행 제안서  ·  (주)씨커스</a:t>
             </a:r>
           </a:p>
         </p:txBody>
@@ -12264,7 +12264,7 @@
                 <a:latin typeface="맑은 고딕"/>
                 <a:ea typeface="맑은 고딕"/>
               </a:rPr>
-              <a:t>CUPIA AI 연구 과제 2026 수행 제안서  ·  (주)시커스랩</a:t>
+              <a:t>CUPIA AI 연구 과제 2026 수행 제안서  ·  (주)씨커스</a:t>
             </a:r>
           </a:p>
         </p:txBody>
@@ -13598,7 +13598,7 @@
                 <a:latin typeface="맑은 고딕"/>
                 <a:ea typeface="맑은 고딕"/>
               </a:rPr>
-              <a:t>CUPIA AI 연구 과제 2026 수행 제안서  ·  (주)시커스랩</a:t>
+              <a:t>CUPIA AI 연구 과제 2026 수행 제안서  ·  (주)씨커스</a:t>
             </a:r>
           </a:p>
         </p:txBody>
@@ -15752,7 +15752,7 @@
                 <a:latin typeface="맑은 고딕"/>
                 <a:ea typeface="맑은 고딕"/>
               </a:rPr>
-              <a:t>CUPIA AI 연구 과제 2026 수행 제안서  ·  (주)시커스랩</a:t>
+              <a:t>CUPIA AI 연구 과제 2026 수행 제안서  ·  (주)씨커스</a:t>
             </a:r>
           </a:p>
         </p:txBody>
@@ -17784,7 +17784,7 @@
                 <a:latin typeface="맑은 고딕"/>
                 <a:ea typeface="맑은 고딕"/>
               </a:rPr>
-              <a:t>CUPIA AI 연구 과제 2026 수행 제안서  ·  (주)시커스랩</a:t>
+              <a:t>CUPIA AI 연구 과제 2026 수행 제안서  ·  (주)씨커스</a:t>
             </a:r>
           </a:p>
         </p:txBody>
@@ -24240,7 +24240,7 @@
                 <a:latin typeface="맑은 고딕"/>
                 <a:ea typeface="맑은 고딕"/>
               </a:rPr>
-              <a:t>CUPIA AI 연구 과제 2026 수행 제안서  ·  (주)시커스랩</a:t>
+              <a:t>CUPIA AI 연구 과제 2026 수행 제안서  ·  (주)씨커스</a:t>
             </a:r>
           </a:p>
         </p:txBody>
